--- a/윤상훈_구름_교육운영매니저_지원Deck.pptx
+++ b/윤상훈_구름_교육운영매니저_지원Deck.pptx
@@ -4768,7 +4768,7 @@
                 <a:ea typeface="Pretendard" pitchFamily="34" charset="-122"/>
                 <a:cs typeface="Pretendard" pitchFamily="34" charset="-120"/>
               </a:rPr>
-              <a:t>50~100명 규모 오프라인 이벤트 운영용 실시간 매칭 웹앱을 React·TypeScript·Supabase·Vercel로 단독 구축·유지보수. 의뢰인과 함께 사용자 피드백 검토하며 운영 중 UX·권한 관리·데이터 구조 이슈를 단계적으로 정리·반영해 왔습니다.</a:t>
+              <a:t>50~100명 규모 오프라인 이벤트 운영용 실시간 매칭 웹앱을 React·TypeScript·Supabase·Vercel로 단독 구축·유지보수. 클라이언트와 함께 사용자 피드백 검토하며 운영 중 UX·권한 관리·데이터 구조 이슈를 단계적으로 정리·반영해 왔습니다.</a:t>
             </a:r>
             <a:endParaRPr lang="en-US" sz="1000" dirty="0"/>
           </a:p>
@@ -6953,7 +6953,7 @@
                 <a:ea typeface="Pretendard" pitchFamily="34" charset="-122"/>
                 <a:cs typeface="Pretendard" pitchFamily="34" charset="-120"/>
               </a:rPr>
-              <a:t>교육 콘텐츠 메타데이터·재가공</a:t>
+              <a:t>교육 콘텐츠 검색성·재사용성 개선</a:t>
             </a:r>
             <a:endParaRPr lang="en-US" sz="1300" dirty="0"/>
           </a:p>
